--- a/docs/presentation/202440724_PPXAI_Presentation.pptx
+++ b/docs/presentation/202440724_PPXAI_Presentation.pptx
@@ -4541,7 +4541,7 @@
           <a:p>
             <a:pPr algn="l"/>
             <a:r>
-              <a:rPr sz="1400" b="1">
+              <a:rPr sz="1600" b="1">
                 <a:solidFill>
                   <a:srgbClr val="0D7377"/>
                 </a:solidFill>
@@ -4576,7 +4576,7 @@
           <a:p>
             <a:pPr algn="l"/>
             <a:r>
-              <a:rPr sz="3200" b="1">
+              <a:rPr sz="3400" b="1">
                 <a:solidFill>
                   <a:srgbClr val="2C3E50"/>
                 </a:solidFill>
@@ -4612,7 +4612,7 @@
           <a:p>
             <a:pPr algn="l"/>
             <a:r>
-              <a:rPr sz="1800" b="0">
+              <a:rPr sz="2000" b="0">
                 <a:solidFill>
                   <a:srgbClr val="5D6D7E"/>
                 </a:solidFill>
@@ -4647,7 +4647,7 @@
           <a:p>
             <a:pPr algn="l"/>
             <a:r>
-              <a:rPr sz="1600" b="0">
+              <a:rPr sz="1800" b="0">
                 <a:solidFill>
                   <a:srgbClr val="2C3E50"/>
                 </a:solidFill>
@@ -4683,7 +4683,7 @@
           <a:p>
             <a:pPr algn="l"/>
             <a:r>
-              <a:rPr sz="1000" b="0">
+              <a:rPr sz="1100" b="0">
                 <a:solidFill>
                   <a:srgbClr val="5D6D7E"/>
                 </a:solidFill>
@@ -4718,7 +4718,7 @@
           <a:p>
             <a:pPr algn="r"/>
             <a:r>
-              <a:rPr sz="1000" b="0">
+              <a:rPr sz="1100" b="0">
                 <a:solidFill>
                   <a:srgbClr val="5D6D7E"/>
                 </a:solidFill>
@@ -4814,7 +4814,7 @@
           <a:p>
             <a:pPr algn="l"/>
             <a:r>
-              <a:rPr sz="2400" b="1">
+              <a:rPr sz="2800" b="1">
                 <a:solidFill>
                   <a:srgbClr val="2C3E50"/>
                 </a:solidFill>
@@ -4849,11 +4849,11 @@
           <a:p>
             <a:pPr algn="l">
               <a:spcAft>
-                <a:spcPts val="1200"/>
+                <a:spcPts val="1400"/>
               </a:spcAft>
             </a:pPr>
             <a:r>
-              <a:rPr sz="1700" b="0">
+              <a:rPr sz="1900" b="0">
                 <a:solidFill>
                   <a:srgbClr val="2C3E50"/>
                 </a:solidFill>
@@ -4865,11 +4865,11 @@
           <a:p>
             <a:pPr algn="l">
               <a:spcAft>
-                <a:spcPts val="1200"/>
+                <a:spcPts val="1400"/>
               </a:spcAft>
             </a:pPr>
             <a:r>
-              <a:rPr sz="1700" b="0">
+              <a:rPr sz="1900" b="0">
                 <a:solidFill>
                   <a:srgbClr val="2C3E50"/>
                 </a:solidFill>
@@ -4881,11 +4881,11 @@
           <a:p>
             <a:pPr algn="l">
               <a:spcAft>
-                <a:spcPts val="1200"/>
+                <a:spcPts val="1400"/>
               </a:spcAft>
             </a:pPr>
             <a:r>
-              <a:rPr sz="1700" b="0">
+              <a:rPr sz="1900" b="0">
                 <a:solidFill>
                   <a:srgbClr val="2C3E50"/>
                 </a:solidFill>
@@ -4897,11 +4897,11 @@
           <a:p>
             <a:pPr algn="l">
               <a:spcAft>
-                <a:spcPts val="1200"/>
+                <a:spcPts val="1400"/>
               </a:spcAft>
             </a:pPr>
             <a:r>
-              <a:rPr sz="1700" b="0">
+              <a:rPr sz="1900" b="0">
                 <a:solidFill>
                   <a:srgbClr val="2C3E50"/>
                 </a:solidFill>
@@ -4913,11 +4913,11 @@
           <a:p>
             <a:pPr algn="l">
               <a:spcAft>
-                <a:spcPts val="1200"/>
+                <a:spcPts val="1400"/>
               </a:spcAft>
             </a:pPr>
             <a:r>
-              <a:rPr sz="1700" b="0">
+              <a:rPr sz="1900" b="0">
                 <a:solidFill>
                   <a:srgbClr val="2C3E50"/>
                 </a:solidFill>
@@ -4929,11 +4929,11 @@
           <a:p>
             <a:pPr algn="l">
               <a:spcAft>
-                <a:spcPts val="1200"/>
+                <a:spcPts val="1400"/>
               </a:spcAft>
             </a:pPr>
             <a:r>
-              <a:rPr sz="1700" b="0">
+              <a:rPr sz="1900" b="0">
                 <a:solidFill>
                   <a:srgbClr val="2C3E50"/>
                 </a:solidFill>
@@ -4968,7 +4968,7 @@
           <a:p>
             <a:pPr algn="l"/>
             <a:r>
-              <a:rPr sz="1000" b="0">
+              <a:rPr sz="1100" b="0">
                 <a:solidFill>
                   <a:srgbClr val="5D6D7E"/>
                 </a:solidFill>
@@ -5003,7 +5003,7 @@
           <a:p>
             <a:pPr algn="r"/>
             <a:r>
-              <a:rPr sz="1000" b="0">
+              <a:rPr sz="1100" b="0">
                 <a:solidFill>
                   <a:srgbClr val="5D6D7E"/>
                 </a:solidFill>
@@ -5099,7 +5099,7 @@
           <a:p>
             <a:pPr algn="l"/>
             <a:r>
-              <a:rPr sz="2200" b="1">
+              <a:rPr sz="2600" b="1">
                 <a:solidFill>
                   <a:srgbClr val="2C3E50"/>
                 </a:solidFill>
@@ -5182,7 +5182,7 @@
           <a:p>
             <a:pPr algn="l"/>
             <a:r>
-              <a:rPr sz="1200" b="0">
+              <a:rPr sz="1500" b="0">
                 <a:solidFill>
                   <a:srgbClr val="2C3E50"/>
                 </a:solidFill>
@@ -5217,7 +5217,7 @@
           <a:p>
             <a:pPr algn="l"/>
             <a:r>
-              <a:rPr sz="1000" b="0">
+              <a:rPr sz="1100" b="0">
                 <a:solidFill>
                   <a:srgbClr val="5D6D7E"/>
                 </a:solidFill>
@@ -5252,7 +5252,7 @@
           <a:p>
             <a:pPr algn="r"/>
             <a:r>
-              <a:rPr sz="1000" b="0">
+              <a:rPr sz="1100" b="0">
                 <a:solidFill>
                   <a:srgbClr val="5D6D7E"/>
                 </a:solidFill>
@@ -5348,7 +5348,7 @@
           <a:p>
             <a:pPr algn="l"/>
             <a:r>
-              <a:rPr sz="2600" b="1">
+              <a:rPr sz="2800" b="1">
                 <a:solidFill>
                   <a:srgbClr val="2C3E50"/>
                 </a:solidFill>
@@ -5383,11 +5383,11 @@
           <a:p>
             <a:pPr algn="l">
               <a:spcAft>
-                <a:spcPts val="1400"/>
+                <a:spcPts val="1600"/>
               </a:spcAft>
             </a:pPr>
             <a:r>
-              <a:rPr sz="1800" b="0">
+              <a:rPr sz="2000" b="0">
                 <a:solidFill>
                   <a:srgbClr val="2C3E50"/>
                 </a:solidFill>
@@ -5399,11 +5399,11 @@
           <a:p>
             <a:pPr algn="l">
               <a:spcAft>
-                <a:spcPts val="1400"/>
+                <a:spcPts val="1600"/>
               </a:spcAft>
             </a:pPr>
             <a:r>
-              <a:rPr sz="1800" b="0">
+              <a:rPr sz="2000" b="0">
                 <a:solidFill>
                   <a:srgbClr val="2C3E50"/>
                 </a:solidFill>
@@ -5415,11 +5415,11 @@
           <a:p>
             <a:pPr algn="l">
               <a:spcAft>
-                <a:spcPts val="1400"/>
+                <a:spcPts val="1600"/>
               </a:spcAft>
             </a:pPr>
             <a:r>
-              <a:rPr sz="1800" b="0">
+              <a:rPr sz="2000" b="0">
                 <a:solidFill>
                   <a:srgbClr val="2C3E50"/>
                 </a:solidFill>
@@ -5431,11 +5431,11 @@
           <a:p>
             <a:pPr algn="l">
               <a:spcAft>
-                <a:spcPts val="1400"/>
+                <a:spcPts val="1600"/>
               </a:spcAft>
             </a:pPr>
             <a:r>
-              <a:rPr sz="1800" b="0">
+              <a:rPr sz="2000" b="0">
                 <a:solidFill>
                   <a:srgbClr val="2C3E50"/>
                 </a:solidFill>
@@ -5447,11 +5447,11 @@
           <a:p>
             <a:pPr algn="l">
               <a:spcAft>
-                <a:spcPts val="1400"/>
+                <a:spcPts val="1600"/>
               </a:spcAft>
             </a:pPr>
             <a:r>
-              <a:rPr sz="1800" b="0">
+              <a:rPr sz="2000" b="0">
                 <a:solidFill>
                   <a:srgbClr val="2C3E50"/>
                 </a:solidFill>
@@ -5486,7 +5486,7 @@
           <a:p>
             <a:pPr algn="l"/>
             <a:r>
-              <a:rPr sz="1600" b="1">
+              <a:rPr sz="1800" b="1">
                 <a:solidFill>
                   <a:srgbClr val="0D7377"/>
                 </a:solidFill>
@@ -5521,7 +5521,7 @@
           <a:p>
             <a:pPr algn="l"/>
             <a:r>
-              <a:rPr sz="1000" b="0">
+              <a:rPr sz="1100" b="0">
                 <a:solidFill>
                   <a:srgbClr val="5D6D7E"/>
                 </a:solidFill>
@@ -5556,7 +5556,7 @@
           <a:p>
             <a:pPr algn="r"/>
             <a:r>
-              <a:rPr sz="1000" b="0">
+              <a:rPr sz="1100" b="0">
                 <a:solidFill>
                   <a:srgbClr val="5D6D7E"/>
                 </a:solidFill>
@@ -5652,7 +5652,7 @@
           <a:p>
             <a:pPr algn="l"/>
             <a:r>
-              <a:rPr sz="2600" b="1">
+              <a:rPr sz="2800" b="1">
                 <a:solidFill>
                   <a:srgbClr val="2C3E50"/>
                 </a:solidFill>
@@ -5687,11 +5687,11 @@
           <a:p>
             <a:pPr algn="l">
               <a:spcAft>
-                <a:spcPts val="1000"/>
+                <a:spcPts val="1200"/>
               </a:spcAft>
             </a:pPr>
             <a:r>
-              <a:rPr sz="1600" b="0">
+              <a:rPr sz="1800" b="0">
                 <a:solidFill>
                   <a:srgbClr val="2C3E50"/>
                 </a:solidFill>
@@ -5703,11 +5703,11 @@
           <a:p>
             <a:pPr algn="l">
               <a:spcAft>
-                <a:spcPts val="1000"/>
+                <a:spcPts val="1200"/>
               </a:spcAft>
             </a:pPr>
             <a:r>
-              <a:rPr sz="1600" b="0">
+              <a:rPr sz="1800" b="0">
                 <a:solidFill>
                   <a:srgbClr val="2C3E50"/>
                 </a:solidFill>
@@ -5719,11 +5719,11 @@
           <a:p>
             <a:pPr algn="l">
               <a:spcAft>
-                <a:spcPts val="1000"/>
+                <a:spcPts val="1200"/>
               </a:spcAft>
             </a:pPr>
             <a:r>
-              <a:rPr sz="1600" b="0">
+              <a:rPr sz="1800" b="0">
                 <a:solidFill>
                   <a:srgbClr val="2C3E50"/>
                 </a:solidFill>
@@ -5735,11 +5735,11 @@
           <a:p>
             <a:pPr algn="l">
               <a:spcAft>
-                <a:spcPts val="1000"/>
+                <a:spcPts val="1200"/>
               </a:spcAft>
             </a:pPr>
             <a:r>
-              <a:rPr sz="1600" b="0">
+              <a:rPr sz="1800" b="0">
                 <a:solidFill>
                   <a:srgbClr val="2C3E50"/>
                 </a:solidFill>
@@ -5751,11 +5751,11 @@
           <a:p>
             <a:pPr algn="l">
               <a:spcAft>
-                <a:spcPts val="1000"/>
+                <a:spcPts val="1200"/>
               </a:spcAft>
             </a:pPr>
             <a:r>
-              <a:rPr sz="1600" b="0">
+              <a:rPr sz="1800" b="0">
                 <a:solidFill>
                   <a:srgbClr val="2C3E50"/>
                 </a:solidFill>
@@ -5767,11 +5767,11 @@
           <a:p>
             <a:pPr algn="l">
               <a:spcAft>
-                <a:spcPts val="1000"/>
+                <a:spcPts val="1200"/>
               </a:spcAft>
             </a:pPr>
             <a:r>
-              <a:rPr sz="1600" b="0">
+              <a:rPr sz="1800" b="0">
                 <a:solidFill>
                   <a:srgbClr val="2C3E50"/>
                 </a:solidFill>
@@ -5806,7 +5806,7 @@
           <a:p>
             <a:pPr algn="l"/>
             <a:r>
-              <a:rPr sz="1000" b="0">
+              <a:rPr sz="1100" b="0">
                 <a:solidFill>
                   <a:srgbClr val="5D6D7E"/>
                 </a:solidFill>
@@ -5841,7 +5841,7 @@
           <a:p>
             <a:pPr algn="r"/>
             <a:r>
-              <a:rPr sz="1000" b="0">
+              <a:rPr sz="1100" b="0">
                 <a:solidFill>
                   <a:srgbClr val="5D6D7E"/>
                 </a:solidFill>
@@ -5937,7 +5937,7 @@
           <a:p>
             <a:pPr algn="l"/>
             <a:r>
-              <a:rPr sz="2400" b="1">
+              <a:rPr sz="2800" b="1">
                 <a:solidFill>
                   <a:srgbClr val="2C3E50"/>
                 </a:solidFill>
@@ -5972,11 +5972,11 @@
           <a:p>
             <a:pPr algn="l">
               <a:spcAft>
-                <a:spcPts val="1000"/>
+                <a:spcPts val="1200"/>
               </a:spcAft>
             </a:pPr>
             <a:r>
-              <a:rPr sz="1600" b="0">
+              <a:rPr sz="1800" b="0">
                 <a:solidFill>
                   <a:srgbClr val="2C3E50"/>
                 </a:solidFill>
@@ -5988,11 +5988,11 @@
           <a:p>
             <a:pPr algn="l">
               <a:spcAft>
-                <a:spcPts val="1000"/>
+                <a:spcPts val="1200"/>
               </a:spcAft>
             </a:pPr>
             <a:r>
-              <a:rPr sz="1600" b="0">
+              <a:rPr sz="1800" b="0">
                 <a:solidFill>
                   <a:srgbClr val="2C3E50"/>
                 </a:solidFill>
@@ -6004,11 +6004,11 @@
           <a:p>
             <a:pPr algn="l">
               <a:spcAft>
-                <a:spcPts val="1000"/>
+                <a:spcPts val="1200"/>
               </a:spcAft>
             </a:pPr>
             <a:r>
-              <a:rPr sz="1600" b="0">
+              <a:rPr sz="1800" b="0">
                 <a:solidFill>
                   <a:srgbClr val="2C3E50"/>
                 </a:solidFill>
@@ -6020,11 +6020,11 @@
           <a:p>
             <a:pPr algn="l">
               <a:spcAft>
-                <a:spcPts val="1000"/>
+                <a:spcPts val="1200"/>
               </a:spcAft>
             </a:pPr>
             <a:r>
-              <a:rPr sz="1600" b="0">
+              <a:rPr sz="1800" b="0">
                 <a:solidFill>
                   <a:srgbClr val="2C3E50"/>
                 </a:solidFill>
@@ -6036,11 +6036,11 @@
           <a:p>
             <a:pPr algn="l">
               <a:spcAft>
-                <a:spcPts val="1000"/>
+                <a:spcPts val="1200"/>
               </a:spcAft>
             </a:pPr>
             <a:r>
-              <a:rPr sz="1600" b="0">
+              <a:rPr sz="1800" b="0">
                 <a:solidFill>
                   <a:srgbClr val="2C3E50"/>
                 </a:solidFill>
@@ -6075,7 +6075,7 @@
           <a:p>
             <a:pPr algn="ctr"/>
             <a:r>
-              <a:rPr sz="2200" b="1">
+              <a:rPr sz="2400" b="1">
                 <a:solidFill>
                   <a:srgbClr val="0D7377"/>
                 </a:solidFill>
@@ -6110,7 +6110,7 @@
           <a:p>
             <a:pPr algn="ctr"/>
             <a:r>
-              <a:rPr sz="1100" b="0">
+              <a:rPr sz="1300" b="0">
                 <a:solidFill>
                   <a:srgbClr val="5D6D7E"/>
                 </a:solidFill>
@@ -6145,7 +6145,7 @@
           <a:p>
             <a:pPr algn="l"/>
             <a:r>
-              <a:rPr sz="1000" b="0">
+              <a:rPr sz="1100" b="0">
                 <a:solidFill>
                   <a:srgbClr val="5D6D7E"/>
                 </a:solidFill>
@@ -6180,7 +6180,7 @@
           <a:p>
             <a:pPr algn="r"/>
             <a:r>
-              <a:rPr sz="1000" b="0">
+              <a:rPr sz="1100" b="0">
                 <a:solidFill>
                   <a:srgbClr val="5D6D7E"/>
                 </a:solidFill>
@@ -6276,7 +6276,7 @@
           <a:p>
             <a:pPr algn="l"/>
             <a:r>
-              <a:rPr sz="2800" b="1">
+              <a:rPr sz="3000" b="1">
                 <a:solidFill>
                   <a:srgbClr val="2C3E50"/>
                 </a:solidFill>
@@ -6311,11 +6311,11 @@
           <a:p>
             <a:pPr algn="l">
               <a:spcAft>
-                <a:spcPts val="1200"/>
+                <a:spcPts val="1400"/>
               </a:spcAft>
             </a:pPr>
             <a:r>
-              <a:rPr sz="1700" b="0">
+              <a:rPr sz="1900" b="0">
                 <a:solidFill>
                   <a:srgbClr val="2C3E50"/>
                 </a:solidFill>
@@ -6327,11 +6327,11 @@
           <a:p>
             <a:pPr algn="l">
               <a:spcAft>
-                <a:spcPts val="1200"/>
+                <a:spcPts val="1400"/>
               </a:spcAft>
             </a:pPr>
             <a:r>
-              <a:rPr sz="1700" b="0">
+              <a:rPr sz="1900" b="0">
                 <a:solidFill>
                   <a:srgbClr val="2C3E50"/>
                 </a:solidFill>
@@ -6343,11 +6343,11 @@
           <a:p>
             <a:pPr algn="l">
               <a:spcAft>
-                <a:spcPts val="1200"/>
+                <a:spcPts val="1400"/>
               </a:spcAft>
             </a:pPr>
             <a:r>
-              <a:rPr sz="1700" b="0">
+              <a:rPr sz="1900" b="0">
                 <a:solidFill>
                   <a:srgbClr val="2C3E50"/>
                 </a:solidFill>
@@ -6359,11 +6359,11 @@
           <a:p>
             <a:pPr algn="l">
               <a:spcAft>
-                <a:spcPts val="1200"/>
+                <a:spcPts val="1400"/>
               </a:spcAft>
             </a:pPr>
             <a:r>
-              <a:rPr sz="1700" b="0">
+              <a:rPr sz="1900" b="0">
                 <a:solidFill>
                   <a:srgbClr val="2C3E50"/>
                 </a:solidFill>
@@ -6375,11 +6375,11 @@
           <a:p>
             <a:pPr algn="l">
               <a:spcAft>
-                <a:spcPts val="1200"/>
+                <a:spcPts val="1400"/>
               </a:spcAft>
             </a:pPr>
             <a:r>
-              <a:rPr sz="1700" b="0">
+              <a:rPr sz="1900" b="0">
                 <a:solidFill>
                   <a:srgbClr val="2C3E50"/>
                 </a:solidFill>
@@ -6407,7 +6407,7 @@
         <p:spPr>
           <a:xfrm>
             <a:off x="6400800" y="914400"/>
-            <a:ext cx="5303520" cy="4196722"/>
+            <a:ext cx="5303520" cy="5271762"/>
           </a:xfrm>
           <a:prstGeom prst="rect">
             <a:avLst/>
@@ -6438,7 +6438,7 @@
           <a:p>
             <a:pPr algn="l"/>
             <a:r>
-              <a:rPr sz="1000" b="0">
+              <a:rPr sz="1100" b="0">
                 <a:solidFill>
                   <a:srgbClr val="5D6D7E"/>
                 </a:solidFill>
@@ -6473,7 +6473,7 @@
           <a:p>
             <a:pPr algn="r"/>
             <a:r>
-              <a:rPr sz="1000" b="0">
+              <a:rPr sz="1100" b="0">
                 <a:solidFill>
                   <a:srgbClr val="5D6D7E"/>
                 </a:solidFill>
@@ -6569,7 +6569,7 @@
           <a:p>
             <a:pPr algn="l"/>
             <a:r>
-              <a:rPr sz="2600" b="1">
+              <a:rPr sz="2800" b="1">
                 <a:solidFill>
                   <a:srgbClr val="2C3E50"/>
                 </a:solidFill>
@@ -6604,7 +6604,7 @@
           <a:p>
             <a:pPr algn="l"/>
             <a:r>
-              <a:rPr sz="1500" b="0">
+              <a:rPr sz="1800" b="0">
                 <a:solidFill>
                   <a:srgbClr val="2C3E50"/>
                 </a:solidFill>
@@ -6639,11 +6639,11 @@
           <a:p>
             <a:pPr algn="l">
               <a:spcAft>
-                <a:spcPts val="1000"/>
+                <a:spcPts val="1200"/>
               </a:spcAft>
             </a:pPr>
             <a:r>
-              <a:rPr sz="1600" b="0">
+              <a:rPr sz="1800" b="0">
                 <a:solidFill>
                   <a:srgbClr val="2C3E50"/>
                 </a:solidFill>
@@ -6655,11 +6655,11 @@
           <a:p>
             <a:pPr algn="l">
               <a:spcAft>
-                <a:spcPts val="1000"/>
+                <a:spcPts val="1200"/>
               </a:spcAft>
             </a:pPr>
             <a:r>
-              <a:rPr sz="1600" b="0">
+              <a:rPr sz="1800" b="0">
                 <a:solidFill>
                   <a:srgbClr val="2C3E50"/>
                 </a:solidFill>
@@ -6671,11 +6671,11 @@
           <a:p>
             <a:pPr algn="l">
               <a:spcAft>
-                <a:spcPts val="1000"/>
+                <a:spcPts val="1200"/>
               </a:spcAft>
             </a:pPr>
             <a:r>
-              <a:rPr sz="1600" b="0">
+              <a:rPr sz="1800" b="0">
                 <a:solidFill>
                   <a:srgbClr val="2C3E50"/>
                 </a:solidFill>
@@ -6687,11 +6687,11 @@
           <a:p>
             <a:pPr algn="l">
               <a:spcAft>
-                <a:spcPts val="1000"/>
+                <a:spcPts val="1200"/>
               </a:spcAft>
             </a:pPr>
             <a:r>
-              <a:rPr sz="1600" b="0">
+              <a:rPr sz="1800" b="0">
                 <a:solidFill>
                   <a:srgbClr val="2C3E50"/>
                 </a:solidFill>
@@ -6703,11 +6703,11 @@
           <a:p>
             <a:pPr algn="l">
               <a:spcAft>
-                <a:spcPts val="1000"/>
+                <a:spcPts val="1200"/>
               </a:spcAft>
             </a:pPr>
             <a:r>
-              <a:rPr sz="1600" b="0">
+              <a:rPr sz="1800" b="0">
                 <a:solidFill>
                   <a:srgbClr val="2C3E50"/>
                 </a:solidFill>
@@ -6742,7 +6742,7 @@
           <a:p>
             <a:pPr algn="l"/>
             <a:r>
-              <a:rPr sz="1000" b="0">
+              <a:rPr sz="1100" b="0">
                 <a:solidFill>
                   <a:srgbClr val="5D6D7E"/>
                 </a:solidFill>
@@ -6777,7 +6777,7 @@
           <a:p>
             <a:pPr algn="r"/>
             <a:r>
-              <a:rPr sz="1000" b="0">
+              <a:rPr sz="1100" b="0">
                 <a:solidFill>
                   <a:srgbClr val="5D6D7E"/>
                 </a:solidFill>
@@ -6873,7 +6873,7 @@
           <a:p>
             <a:pPr algn="l"/>
             <a:r>
-              <a:rPr sz="2400" b="1">
+              <a:rPr sz="2800" b="1">
                 <a:solidFill>
                   <a:srgbClr val="2C3E50"/>
                 </a:solidFill>
@@ -6932,7 +6932,7 @@
           <a:p>
             <a:pPr algn="l"/>
             <a:r>
-              <a:rPr sz="1000" b="0">
+              <a:rPr sz="1100" b="0">
                 <a:solidFill>
                   <a:srgbClr val="5D6D7E"/>
                 </a:solidFill>
@@ -6967,7 +6967,7 @@
           <a:p>
             <a:pPr algn="r"/>
             <a:r>
-              <a:rPr sz="1000" b="0">
+              <a:rPr sz="1100" b="0">
                 <a:solidFill>
                   <a:srgbClr val="5D6D7E"/>
                 </a:solidFill>
@@ -7063,7 +7063,7 @@
           <a:p>
             <a:pPr algn="l"/>
             <a:r>
-              <a:rPr sz="2600" b="1">
+              <a:rPr sz="2800" b="1">
                 <a:solidFill>
                   <a:srgbClr val="2C3E50"/>
                 </a:solidFill>
@@ -7098,11 +7098,11 @@
           <a:p>
             <a:pPr algn="l">
               <a:spcAft>
-                <a:spcPts val="800"/>
+                <a:spcPts val="1000"/>
               </a:spcAft>
             </a:pPr>
             <a:r>
-              <a:rPr sz="1500" b="0">
+              <a:rPr sz="1700" b="0">
                 <a:solidFill>
                   <a:srgbClr val="2C3E50"/>
                 </a:solidFill>
@@ -7114,11 +7114,11 @@
           <a:p>
             <a:pPr algn="l">
               <a:spcAft>
-                <a:spcPts val="800"/>
+                <a:spcPts val="1000"/>
               </a:spcAft>
             </a:pPr>
             <a:r>
-              <a:rPr sz="1500" b="0">
+              <a:rPr sz="1700" b="0">
                 <a:solidFill>
                   <a:srgbClr val="2C3E50"/>
                 </a:solidFill>
@@ -7130,11 +7130,11 @@
           <a:p>
             <a:pPr algn="l">
               <a:spcAft>
-                <a:spcPts val="800"/>
+                <a:spcPts val="1000"/>
               </a:spcAft>
             </a:pPr>
             <a:r>
-              <a:rPr sz="1500" b="0">
+              <a:rPr sz="1700" b="0">
                 <a:solidFill>
                   <a:srgbClr val="2C3E50"/>
                 </a:solidFill>
@@ -7146,11 +7146,11 @@
           <a:p>
             <a:pPr algn="l">
               <a:spcAft>
-                <a:spcPts val="800"/>
+                <a:spcPts val="1000"/>
               </a:spcAft>
             </a:pPr>
             <a:r>
-              <a:rPr sz="1500" b="0">
+              <a:rPr sz="1700" b="0">
                 <a:solidFill>
                   <a:srgbClr val="2C3E50"/>
                 </a:solidFill>
@@ -7162,11 +7162,11 @@
           <a:p>
             <a:pPr algn="l">
               <a:spcAft>
-                <a:spcPts val="800"/>
+                <a:spcPts val="1000"/>
               </a:spcAft>
             </a:pPr>
             <a:r>
-              <a:rPr sz="1500" b="0">
+              <a:rPr sz="1700" b="0">
                 <a:solidFill>
                   <a:srgbClr val="2C3E50"/>
                 </a:solidFill>
@@ -7178,11 +7178,11 @@
           <a:p>
             <a:pPr algn="l">
               <a:spcAft>
-                <a:spcPts val="800"/>
+                <a:spcPts val="1000"/>
               </a:spcAft>
             </a:pPr>
             <a:r>
-              <a:rPr sz="1500" b="0">
+              <a:rPr sz="1700" b="0">
                 <a:solidFill>
                   <a:srgbClr val="2C3E50"/>
                 </a:solidFill>
@@ -7194,11 +7194,11 @@
           <a:p>
             <a:pPr algn="l">
               <a:spcAft>
-                <a:spcPts val="800"/>
+                <a:spcPts val="1000"/>
               </a:spcAft>
             </a:pPr>
             <a:r>
-              <a:rPr sz="1500" b="0">
+              <a:rPr sz="1700" b="0">
                 <a:solidFill>
                   <a:srgbClr val="2C3E50"/>
                 </a:solidFill>
@@ -7281,7 +7281,7 @@
           <a:p>
             <a:pPr algn="l"/>
             <a:r>
-              <a:rPr sz="1000" b="0">
+              <a:rPr sz="1100" b="0">
                 <a:solidFill>
                   <a:srgbClr val="5D6D7E"/>
                 </a:solidFill>
@@ -7316,7 +7316,7 @@
           <a:p>
             <a:pPr algn="r"/>
             <a:r>
-              <a:rPr sz="1000" b="0">
+              <a:rPr sz="1100" b="0">
                 <a:solidFill>
                   <a:srgbClr val="5D6D7E"/>
                 </a:solidFill>
@@ -7412,7 +7412,7 @@
           <a:p>
             <a:pPr algn="l"/>
             <a:r>
-              <a:rPr sz="2400" b="1">
+              <a:rPr sz="2800" b="1">
                 <a:solidFill>
                   <a:srgbClr val="2C3E50"/>
                 </a:solidFill>
@@ -7471,7 +7471,7 @@
           <a:p>
             <a:pPr algn="l"/>
             <a:r>
-              <a:rPr sz="1000" b="0">
+              <a:rPr sz="1100" b="0">
                 <a:solidFill>
                   <a:srgbClr val="5D6D7E"/>
                 </a:solidFill>
@@ -7506,7 +7506,7 @@
           <a:p>
             <a:pPr algn="r"/>
             <a:r>
-              <a:rPr sz="1000" b="0">
+              <a:rPr sz="1100" b="0">
                 <a:solidFill>
                   <a:srgbClr val="5D6D7E"/>
                 </a:solidFill>
@@ -7602,7 +7602,7 @@
           <a:p>
             <a:pPr algn="l"/>
             <a:r>
-              <a:rPr sz="2400" b="1">
+              <a:rPr sz="2800" b="1">
                 <a:solidFill>
                   <a:srgbClr val="2C3E50"/>
                 </a:solidFill>
@@ -7685,7 +7685,7 @@
           <a:p>
             <a:pPr algn="l"/>
             <a:r>
-              <a:rPr sz="1200" b="0">
+              <a:rPr sz="1500" b="0">
                 <a:solidFill>
                   <a:srgbClr val="5D6D7E"/>
                 </a:solidFill>
@@ -7720,7 +7720,7 @@
           <a:p>
             <a:pPr algn="l"/>
             <a:r>
-              <a:rPr sz="1000" b="0">
+              <a:rPr sz="1100" b="0">
                 <a:solidFill>
                   <a:srgbClr val="5D6D7E"/>
                 </a:solidFill>
@@ -7755,7 +7755,7 @@
           <a:p>
             <a:pPr algn="r"/>
             <a:r>
-              <a:rPr sz="1000" b="0">
+              <a:rPr sz="1100" b="0">
                 <a:solidFill>
                   <a:srgbClr val="5D6D7E"/>
                 </a:solidFill>
@@ -7851,7 +7851,7 @@
           <a:p>
             <a:pPr algn="l"/>
             <a:r>
-              <a:rPr sz="2400" b="1">
+              <a:rPr sz="2800" b="1">
                 <a:solidFill>
                   <a:srgbClr val="2C3E50"/>
                 </a:solidFill>
@@ -7934,7 +7934,7 @@
           <a:p>
             <a:pPr algn="l"/>
             <a:r>
-              <a:rPr sz="1300" b="0">
+              <a:rPr sz="1600" b="0">
                 <a:solidFill>
                   <a:srgbClr val="2C3E50"/>
                 </a:solidFill>
@@ -7969,7 +7969,7 @@
           <a:p>
             <a:pPr algn="l"/>
             <a:r>
-              <a:rPr sz="1000" b="0">
+              <a:rPr sz="1100" b="0">
                 <a:solidFill>
                   <a:srgbClr val="5D6D7E"/>
                 </a:solidFill>
@@ -8004,7 +8004,7 @@
           <a:p>
             <a:pPr algn="r"/>
             <a:r>
-              <a:rPr sz="1000" b="0">
+              <a:rPr sz="1100" b="0">
                 <a:solidFill>
                   <a:srgbClr val="5D6D7E"/>
                 </a:solidFill>
@@ -8100,7 +8100,7 @@
           <a:p>
             <a:pPr algn="l"/>
             <a:r>
-              <a:rPr sz="2200" b="1">
+              <a:rPr sz="2600" b="1">
                 <a:solidFill>
                   <a:srgbClr val="2C3E50"/>
                 </a:solidFill>
@@ -8183,7 +8183,7 @@
           <a:p>
             <a:pPr algn="l"/>
             <a:r>
-              <a:rPr sz="1300" b="0">
+              <a:rPr sz="1600" b="0">
                 <a:solidFill>
                   <a:srgbClr val="2C3E50"/>
                 </a:solidFill>
@@ -8218,7 +8218,7 @@
           <a:p>
             <a:pPr algn="l"/>
             <a:r>
-              <a:rPr sz="1000" b="0">
+              <a:rPr sz="1100" b="0">
                 <a:solidFill>
                   <a:srgbClr val="5D6D7E"/>
                 </a:solidFill>
@@ -8253,7 +8253,7 @@
           <a:p>
             <a:pPr algn="r"/>
             <a:r>
-              <a:rPr sz="1000" b="0">
+              <a:rPr sz="1100" b="0">
                 <a:solidFill>
                   <a:srgbClr val="5D6D7E"/>
                 </a:solidFill>
